--- a/curriculum/M01/W04/L02/slides-2.pptx
+++ b/curriculum/M01/W04/L02/slides-2.pptx
@@ -14633,7 +14633,7 @@
                 <a:ea typeface="Malgun Gothic"/>
                 <a:cs typeface="Malgun Gothic"/>
               </a:rPr>
-              <a:t>M01-W01-L03 소화계 요약 — 영양소의 소화와 흡수, 간의 기능</a:t>
+              <a:t>M01-W01-L03 소화계 요약: 소화·흡수·간의 역할 — 영양소의 소화와 흡수, 간의 기능</a:t>
             </a:r>
           </a:p>
           <a:p>
@@ -14662,7 +14662,7 @@
                 <a:ea typeface="Malgun Gothic"/>
                 <a:cs typeface="Malgun Gothic"/>
               </a:rPr>
-              <a:t>M01-W02-L02 내분비계 요약 — insulin과 glucagon, 호르몬의 작용 방식</a:t>
+              <a:t>M01-W02-L02 내분비계 요약: 호르몬과 되먹임 — insulin과 glucagon, 호르몬의 작용 방식</a:t>
             </a:r>
           </a:p>
           <a:p>

--- a/curriculum/M01/W04/L02/slides-2.pptx
+++ b/curriculum/M01/W04/L02/slides-2.pptx
@@ -7043,7 +7043,7 @@
               </a:spcAft>
             </a:pPr>
             <a:r>
-              <a:rPr sz="2000" b="1" i="0">
+              <a:rPr sz="1800" b="1" i="0">
                 <a:solidFill>
                   <a:srgbClr val="F2B705"/>
                 </a:solidFill>
@@ -7054,37 +7054,37 @@
               <a:t>•  </a:t>
             </a:r>
             <a:r>
-              <a:rPr sz="2000" b="0" i="0">
-                <a:solidFill>
-                  <a:srgbClr val="11202B"/>
-                </a:solidFill>
-                <a:latin typeface="Malgun Gothic"/>
-                <a:ea typeface="Malgun Gothic"/>
-                <a:cs typeface="Malgun Gothic"/>
-              </a:rPr>
-              <a:t>대량영양소가 연료와 재료라면 미량영양소는 </a:t>
-            </a:r>
-            <a:r>
-              <a:rPr sz="2000" b="1" i="0">
-                <a:solidFill>
-                  <a:srgbClr val="11202B"/>
-                </a:solidFill>
-                <a:latin typeface="Malgun Gothic"/>
-                <a:ea typeface="Malgun Gothic"/>
-                <a:cs typeface="Malgun Gothic"/>
-              </a:rPr>
-              <a:t>그것을 처리하는 기계의 부품</a:t>
-            </a:r>
-            <a:r>
-              <a:rPr sz="2000" b="0" i="0">
-                <a:solidFill>
-                  <a:srgbClr val="11202B"/>
-                </a:solidFill>
-                <a:latin typeface="Malgun Gothic"/>
-                <a:ea typeface="Malgun Gothic"/>
-                <a:cs typeface="Malgun Gothic"/>
-              </a:rPr>
-              <a:t>이다. 기능을 범주로 묶으면 결핍 증상을 외우지 않고 추론할 수 있다.</a:t>
+              <a:rPr sz="1800" b="0" i="0">
+                <a:solidFill>
+                  <a:srgbClr val="11202B"/>
+                </a:solidFill>
+                <a:latin typeface="Malgun Gothic"/>
+                <a:ea typeface="Malgun Gothic"/>
+                <a:cs typeface="Malgun Gothic"/>
+              </a:rPr>
+              <a:t>지금까지 다룬 것은 모두 연료와 재료였다. 그런데 그것을 처리하는 효소들은 대부분 혼자서 일하지 못한다. 금속 이온이나 비타민에서 유래한 보조 분자가 있어야 반응이 돌아간다. 이 절은 그 부품들을 다루며, </a:t>
+            </a:r>
+            <a:r>
+              <a:rPr sz="1800" b="1" i="0">
+                <a:solidFill>
+                  <a:srgbClr val="11202B"/>
+                </a:solidFill>
+                <a:latin typeface="Malgun Gothic"/>
+                <a:ea typeface="Malgun Gothic"/>
+                <a:cs typeface="Malgun Gothic"/>
+              </a:rPr>
+              <a:t>기능으로 묶으면 결핍 증상을 외우지 않고 추론할 수 있다</a:t>
+            </a:r>
+            <a:r>
+              <a:rPr sz="1800" b="0" i="0">
+                <a:solidFill>
+                  <a:srgbClr val="11202B"/>
+                </a:solidFill>
+                <a:latin typeface="Malgun Gothic"/>
+                <a:ea typeface="Malgun Gothic"/>
+                <a:cs typeface="Malgun Gothic"/>
+              </a:rPr>
+              <a:t>는 점을 보인다.</a:t>
             </a:r>
           </a:p>
           <a:p>
@@ -7094,7 +7094,7 @@
               </a:spcAft>
             </a:pPr>
             <a:r>
-              <a:rPr sz="2000" b="1" i="0">
+              <a:rPr sz="1800" b="1" i="0">
                 <a:solidFill>
                   <a:srgbClr val="F2B705"/>
                 </a:solidFill>
@@ -7105,7 +7105,58 @@
               <a:t>•  </a:t>
             </a:r>
             <a:r>
-              <a:rPr sz="2000" b="1" i="0">
+              <a:rPr sz="1800" b="0" i="0">
+                <a:solidFill>
+                  <a:srgbClr val="11202B"/>
+                </a:solidFill>
+                <a:latin typeface="Malgun Gothic"/>
+                <a:ea typeface="Malgun Gothic"/>
+                <a:cs typeface="Malgun Gothic"/>
+              </a:rPr>
+              <a:t>대량영양소가 연료와 재료라면 미량영양소는 </a:t>
+            </a:r>
+            <a:r>
+              <a:rPr sz="1800" b="1" i="0">
+                <a:solidFill>
+                  <a:srgbClr val="11202B"/>
+                </a:solidFill>
+                <a:latin typeface="Malgun Gothic"/>
+                <a:ea typeface="Malgun Gothic"/>
+                <a:cs typeface="Malgun Gothic"/>
+              </a:rPr>
+              <a:t>그것을 처리하는 기계의 부품</a:t>
+            </a:r>
+            <a:r>
+              <a:rPr sz="1800" b="0" i="0">
+                <a:solidFill>
+                  <a:srgbClr val="11202B"/>
+                </a:solidFill>
+                <a:latin typeface="Malgun Gothic"/>
+                <a:ea typeface="Malgun Gothic"/>
+                <a:cs typeface="Malgun Gothic"/>
+              </a:rPr>
+              <a:t>이다. 기능을 범주로 묶으면 결핍 증상을 외우지 않고 추론할 수 있다.</a:t>
+            </a:r>
+          </a:p>
+          <a:p>
+            <a:pPr>
+              <a:spcAft>
+                <a:spcPts val="900"/>
+              </a:spcAft>
+            </a:pPr>
+            <a:r>
+              <a:rPr sz="1800" b="1" i="0">
+                <a:solidFill>
+                  <a:srgbClr val="F2B705"/>
+                </a:solidFill>
+                <a:latin typeface="Malgun Gothic"/>
+                <a:ea typeface="Malgun Gothic"/>
+                <a:cs typeface="Malgun Gothic"/>
+              </a:rPr>
+              <a:t>•  </a:t>
+            </a:r>
+            <a:r>
+              <a:rPr sz="1800" b="1" i="0">
                 <a:solidFill>
                   <a:srgbClr val="11202B"/>
                 </a:solidFill>
@@ -7116,7 +7167,7 @@
               <a:t>1. 조효소로 작용한다.</a:t>
             </a:r>
             <a:r>
-              <a:rPr sz="2000" b="0" i="0">
+              <a:rPr sz="1800" b="0" i="0">
                 <a:solidFill>
                   <a:srgbClr val="11202B"/>
                 </a:solidFill>
@@ -8981,6 +9032,35 @@
                 <a:ea typeface="Malgun Gothic"/>
                 <a:cs typeface="Malgun Gothic"/>
               </a:rPr>
+              <a:t>여기까지 경로, 조절, 측정, 보조인자를 모두 세웠다. 이제 그것이 무너졌을 때를 본다. 대사 질환은 이름이 수백 가지지만, 그 앞에서 던지는 질문은 매번 같은 몇 개다. 질문을 먼저 정해 두면 처음 보는 질환도 자리를 찾을 수 있다.</a:t>
+            </a:r>
+          </a:p>
+          <a:p>
+            <a:pPr>
+              <a:spcAft>
+                <a:spcPts val="900"/>
+              </a:spcAft>
+            </a:pPr>
+            <a:r>
+              <a:rPr sz="1400" b="1" i="0">
+                <a:solidFill>
+                  <a:srgbClr val="F2B705"/>
+                </a:solidFill>
+                <a:latin typeface="Malgun Gothic"/>
+                <a:ea typeface="Malgun Gothic"/>
+                <a:cs typeface="Malgun Gothic"/>
+              </a:rPr>
+              <a:t>•  </a:t>
+            </a:r>
+            <a:r>
+              <a:rPr sz="1400" b="0" i="0">
+                <a:solidFill>
+                  <a:srgbClr val="11202B"/>
+                </a:solidFill>
+                <a:latin typeface="Malgun Gothic"/>
+                <a:ea typeface="Malgun Gothic"/>
+                <a:cs typeface="Malgun Gothic"/>
+              </a:rPr>
               <a:t>대사 질환은 종류가 많아 보이지만 묻는 질문은 네 가지뿐이다.</a:t>
             </a:r>
           </a:p>
@@ -9985,6 +10065,57 @@
                 <a:ea typeface="Malgun Gothic"/>
                 <a:cs typeface="Malgun Gothic"/>
               </a:rPr>
+              <a:t>이 수업은 경로의 세부가 아니라 </a:t>
+            </a:r>
+            <a:r>
+              <a:rPr sz="1400" b="1" i="0">
+                <a:solidFill>
+                  <a:srgbClr val="11202B"/>
+                </a:solidFill>
+                <a:latin typeface="Malgun Gothic"/>
+                <a:ea typeface="Malgun Gothic"/>
+                <a:cs typeface="Malgun Gothic"/>
+              </a:rPr>
+              <a:t>지도</a:t>
+            </a:r>
+            <a:r>
+              <a:rPr sz="1400" b="0" i="0">
+                <a:solidFill>
+                  <a:srgbClr val="11202B"/>
+                </a:solidFill>
+                <a:latin typeface="Malgun Gothic"/>
+                <a:ea typeface="Malgun Gothic"/>
+                <a:cs typeface="Malgun Gothic"/>
+              </a:rPr>
+              <a:t>를 세우는 것이 목적이었다. 각 경로의 효소와 중간체, 조절 지점의 상세는 뒤의 모듈이 맡는다. 마지막으로 여기서 세운 틀이 어디로 이어지는지를 확인해 둔다.</a:t>
+            </a:r>
+          </a:p>
+          <a:p>
+            <a:pPr>
+              <a:spcAft>
+                <a:spcPts val="900"/>
+              </a:spcAft>
+            </a:pPr>
+            <a:r>
+              <a:rPr sz="1400" b="1" i="0">
+                <a:solidFill>
+                  <a:srgbClr val="F2B705"/>
+                </a:solidFill>
+                <a:latin typeface="Malgun Gothic"/>
+                <a:ea typeface="Malgun Gothic"/>
+                <a:cs typeface="Malgun Gothic"/>
+              </a:rPr>
+              <a:t>•  </a:t>
+            </a:r>
+            <a:r>
+              <a:rPr sz="1400" b="0" i="0">
+                <a:solidFill>
+                  <a:srgbClr val="11202B"/>
+                </a:solidFill>
+                <a:latin typeface="Malgun Gothic"/>
+                <a:ea typeface="Malgun Gothic"/>
+                <a:cs typeface="Malgun Gothic"/>
+              </a:rPr>
               <a:t>이 수업은 대사의 </a:t>
             </a:r>
             <a:r>
@@ -20103,6 +20234,57 @@
                 <a:ea typeface="Malgun Gothic"/>
                 <a:cs typeface="Malgun Gothic"/>
               </a:rPr>
+              <a:t>앞 절에서 호르몬이 방향을 정한다고 했다. 그런데 호르몬이 경로의 모든 단계를 일일이 조절하지는 않는다. 몇 군데만 건드려도 경로 전체의 속도가 바뀌기 때문이다. </a:t>
+            </a:r>
+            <a:r>
+              <a:rPr sz="1400" b="1" i="0">
+                <a:solidFill>
+                  <a:srgbClr val="11202B"/>
+                </a:solidFill>
+                <a:latin typeface="Malgun Gothic"/>
+                <a:ea typeface="Malgun Gothic"/>
+                <a:cs typeface="Malgun Gothic"/>
+              </a:rPr>
+              <a:t>그 몇 군데가 어디인지에는 규칙이 있고</a:t>
+            </a:r>
+            <a:r>
+              <a:rPr sz="1400" b="0" i="0">
+                <a:solidFill>
+                  <a:srgbClr val="11202B"/>
+                </a:solidFill>
+                <a:latin typeface="Malgun Gothic"/>
+                <a:ea typeface="Malgun Gothic"/>
+                <a:cs typeface="Malgun Gothic"/>
+              </a:rPr>
+              <a:t>, 그 규칙을 알면 처음 보는 경로에서도 조절 지점을 찾아낼 수 있다.</a:t>
+            </a:r>
+          </a:p>
+          <a:p>
+            <a:pPr>
+              <a:spcAft>
+                <a:spcPts val="900"/>
+              </a:spcAft>
+            </a:pPr>
+            <a:r>
+              <a:rPr sz="1400" b="1" i="0">
+                <a:solidFill>
+                  <a:srgbClr val="F2B705"/>
+                </a:solidFill>
+                <a:latin typeface="Malgun Gothic"/>
+                <a:ea typeface="Malgun Gothic"/>
+                <a:cs typeface="Malgun Gothic"/>
+              </a:rPr>
+              <a:t>•  </a:t>
+            </a:r>
+            <a:r>
+              <a:rPr sz="1400" b="0" i="0">
+                <a:solidFill>
+                  <a:srgbClr val="11202B"/>
+                </a:solidFill>
+                <a:latin typeface="Malgun Gothic"/>
+                <a:ea typeface="Malgun Gothic"/>
+                <a:cs typeface="Malgun Gothic"/>
+              </a:rPr>
               <a:t>경로 전체를 외우지 않고도 조절을 이해하는 방법이 있다. </a:t>
             </a:r>
             <a:r>
@@ -21022,6 +21204,35 @@
               <a:t>•  </a:t>
             </a:r>
             <a:r>
+              <a:rPr sz="1400" b="0" i="0">
+                <a:solidFill>
+                  <a:srgbClr val="11202B"/>
+                </a:solidFill>
+                <a:latin typeface="Malgun Gothic"/>
+                <a:ea typeface="Malgun Gothic"/>
+                <a:cs typeface="Malgun Gothic"/>
+              </a:rPr>
+              <a:t>여기까지는 세포 안의 이야기였다. 이제 눈금을 몸 전체로 키운다. 들어온 에너지와 나간 에너지의 차이가 몸무게를 정한다는 단순한 식에서 시작하되, 그 식의 각 항이 실제로 무엇을 뜻하는지를 따져 보면 생각보다 단순하지 않다는 것이 드러난다.</a:t>
+            </a:r>
+          </a:p>
+          <a:p>
+            <a:pPr>
+              <a:spcAft>
+                <a:spcPts val="900"/>
+              </a:spcAft>
+            </a:pPr>
+            <a:r>
+              <a:rPr sz="1400" b="1" i="0">
+                <a:solidFill>
+                  <a:srgbClr val="F2B705"/>
+                </a:solidFill>
+                <a:latin typeface="Malgun Gothic"/>
+                <a:ea typeface="Malgun Gothic"/>
+                <a:cs typeface="Malgun Gothic"/>
+              </a:rPr>
+              <a:t>•  </a:t>
+            </a:r>
+            <a:r>
               <a:rPr sz="1400" b="1" i="0">
                 <a:solidFill>
                   <a:srgbClr val="11202B"/>
@@ -22029,6 +22240,57 @@
             <a:spAutoFit/>
           </a:bodyPr>
           <a:lstStyle/>
+          <a:p>
+            <a:pPr>
+              <a:spcAft>
+                <a:spcPts val="900"/>
+              </a:spcAft>
+            </a:pPr>
+            <a:r>
+              <a:rPr sz="1800" b="1" i="0">
+                <a:solidFill>
+                  <a:srgbClr val="F2B705"/>
+                </a:solidFill>
+                <a:latin typeface="Malgun Gothic"/>
+                <a:ea typeface="Malgun Gothic"/>
+                <a:cs typeface="Malgun Gothic"/>
+              </a:rPr>
+              <a:t>•  </a:t>
+            </a:r>
+            <a:r>
+              <a:rPr sz="1800" b="0" i="0">
+                <a:solidFill>
+                  <a:srgbClr val="11202B"/>
+                </a:solidFill>
+                <a:latin typeface="Malgun Gothic"/>
+                <a:ea typeface="Malgun Gothic"/>
+                <a:cs typeface="Malgun Gothic"/>
+              </a:rPr>
+              <a:t>앞 절의 식에 나오는 항들은 모두 </a:t>
+            </a:r>
+            <a:r>
+              <a:rPr sz="1800" b="1" i="0">
+                <a:solidFill>
+                  <a:srgbClr val="11202B"/>
+                </a:solidFill>
+                <a:latin typeface="Malgun Gothic"/>
+                <a:ea typeface="Malgun Gothic"/>
+                <a:cs typeface="Malgun Gothic"/>
+              </a:rPr>
+              <a:t>재야 하는 값</a:t>
+            </a:r>
+            <a:r>
+              <a:rPr sz="1800" b="0" i="0">
+                <a:solidFill>
+                  <a:srgbClr val="11202B"/>
+                </a:solidFill>
+                <a:latin typeface="Malgun Gothic"/>
+                <a:ea typeface="Malgun Gothic"/>
+                <a:cs typeface="Malgun Gothic"/>
+              </a:rPr>
+              <a:t>이다. 그런데 세포 안의 반응을 직접 들여다볼 수는 없다. 그래서 대사 연구에서는 무엇을 어떻게 재는지가 곧 무엇을 알 수 있는지의 한계가 된다. 이 절은 그 방법들을 원리로 구분한다.</a:t>
+            </a:r>
+          </a:p>
           <a:p>
             <a:pPr>
               <a:spcAft>
